--- a/website/static/sales/Zyvor-Netra-Product-Perspective.pptx
+++ b/website/static/sales/Zyvor-Netra-Product-Perspective.pptx
@@ -6707,7 +6707,7 @@
                 <a:ea typeface="Arial" pitchFamily="34" charset="-122"/>
                 <a:cs typeface="Arial" pitchFamily="34" charset="-120"/>
               </a:rPr>
-              <a:t>Apache-2.0 core</a:t>
+              <a:t>Zyvor Production License</a:t>
             </a:r>
             <a:endParaRPr lang="en-US" sz="1400" dirty="0"/>
           </a:p>
@@ -6746,7 +6746,7 @@
                 <a:ea typeface="Arial" pitchFamily="34" charset="-122"/>
                 <a:cs typeface="Arial" pitchFamily="34" charset="-120"/>
               </a:rPr>
-              <a:t>Open source with enterprise operational discipline.</a:t>
+              <a:t>Free for non-production; a commercial license for production.</a:t>
             </a:r>
             <a:endParaRPr lang="en-US" sz="1200" dirty="0"/>
           </a:p>
